--- a/docs/user-manual/04-md.pptx
+++ b/docs/user-manual/04-md.pptx
@@ -3503,48 +3503,6 @@
           </a:p>
         </p:txBody>
       </p:sp>
-      <p:sp>
-        <p:nvSpPr>
-          <p:cNvPr id="12" name="TextBox 11"/>
-          <p:cNvSpPr txBox="1"/>
-          <p:nvPr/>
-        </p:nvSpPr>
-        <p:spPr>
-          <a:xfrm>
-            <a:off x="2926080" y="4992624"/>
-            <a:ext cx="6400800" cy="292608"/>
-          </a:xfrm>
-          <a:prstGeom prst="rect">
-            <a:avLst/>
-          </a:prstGeom>
-          <a:noFill/>
-        </p:spPr>
-        <p:txBody>
-          <a:bodyPr wrap="none">
-            <a:spAutoFit/>
-          </a:bodyPr>
-          <a:lstStyle/>
-          <a:p>
-            <a:pPr algn="l"/>
-            <a:r>
-              <a:rPr sz="1100" b="1">
-                <a:solidFill>
-                  <a:srgbClr val="8AB4D8"/>
-                </a:solidFill>
-              </a:rPr>
-              <a:t>Version:  </a:t>
-            </a:r>
-            <a:r>
-              <a:rPr sz="1100">
-                <a:solidFill>
-                  <a:srgbClr val="D0E3F2"/>
-                </a:solidFill>
-              </a:rPr>
-              <a:t>1.0</a:t>
-            </a:r>
-          </a:p>
-        </p:txBody>
-      </p:sp>
     </p:spTree>
   </p:cSld>
   <p:clrMapOvr>
@@ -4155,7 +4113,7 @@
                 </a:solidFill>
                 <a:latin typeface="Consolas"/>
               </a:rPr>
-              <a:t>                                                 |</a:t>
+              <a:t>                          |                       |</a:t>
             </a:r>
           </a:p>
           <a:p>
@@ -4166,7 +4124,7 @@
                 </a:solidFill>
                 <a:latin typeface="Consolas"/>
               </a:rPr>
-              <a:t>                                          pending_md  &lt;-- your queue</a:t>
+              <a:t>                  Procurement sees PR        pending_md  &lt;-- your queue</a:t>
             </a:r>
           </a:p>
           <a:p>
@@ -4177,7 +4135,7 @@
                 </a:solidFill>
                 <a:latin typeface="Consolas"/>
               </a:rPr>
-              <a:t>                                                 |</a:t>
+              <a:t>                  read-only; quotes may           |</a:t>
             </a:r>
           </a:p>
           <a:p>
@@ -4188,7 +4146,7 @@
                 </a:solidFill>
                 <a:latin typeface="Consolas"/>
               </a:rPr>
-              <a:t>                                        approve / reject</a:t>
+              <a:t>                  already be prepared      approve / reject</a:t>
             </a:r>
           </a:p>
           <a:p>
@@ -4199,7 +4157,7 @@
                 </a:solidFill>
                 <a:latin typeface="Consolas"/>
               </a:rPr>
-              <a:t>                                                 |</a:t>
+              <a:t>                                                   |</a:t>
             </a:r>
           </a:p>
           <a:p>
@@ -4210,7 +4168,7 @@
                 </a:solidFill>
                 <a:latin typeface="Consolas"/>
               </a:rPr>
-              <a:t>                                   +-------------+-----------+</a:t>
+              <a:t>                                    +--------------+------------+</a:t>
             </a:r>
           </a:p>
           <a:p>
@@ -4221,7 +4179,7 @@
                 </a:solidFill>
                 <a:latin typeface="Consolas"/>
               </a:rPr>
-              <a:t>                                   |                         |</a:t>
+              <a:t>                                    |                           |</a:t>
             </a:r>
           </a:p>
           <a:p>
@@ -4232,7 +4190,7 @@
                 </a:solidFill>
                 <a:latin typeface="Consolas"/>
               </a:rPr>
-              <a:t>                                   v                         v</a:t>
+              <a:t>                                    v                           v</a:t>
             </a:r>
           </a:p>
           <a:p>
@@ -4243,7 +4201,7 @@
                 </a:solidFill>
                 <a:latin typeface="Consolas"/>
               </a:rPr>
-              <a:t>                               approved                  rejected</a:t>
+              <a:t>                                approved                    rejected</a:t>
             </a:r>
           </a:p>
           <a:p>
@@ -4254,7 +4212,7 @@
                 </a:solidFill>
                 <a:latin typeface="Consolas"/>
               </a:rPr>
-              <a:t>                        (Procurement executes)    (initiator notified)</a:t>
+              <a:t>                         (Procurement executes PO)  (initiator notified)</a:t>
             </a:r>
           </a:p>
         </p:txBody>
@@ -4774,7 +4732,7 @@
                   <a:srgbClr val="111111"/>
                 </a:solidFill>
               </a:rPr>
-              <a:t>Ask: Is the supplier known and reliable, or new and untested?</a:t>
+              <a:t>Check the adjudication section — Procurement should have quotes and a winning vendor ready. If quotes are missing, contact Procurement before approving.</a:t>
             </a:r>
           </a:p>
         </p:txBody>
@@ -4859,7 +4817,7 @@
                   <a:srgbClr val="111111"/>
                 </a:solidFill>
               </a:rPr>
-              <a:t>Ask: Is there a genuine reason this must be approved now?</a:t>
+              <a:t>Ask: Is the supplier known and reliable, or new and untested?</a:t>
             </a:r>
           </a:p>
         </p:txBody>
@@ -5156,7 +5114,7 @@
                   <a:srgbClr val="111111"/>
                 </a:solidFill>
               </a:rPr>
-              <a:t>Procurement receives it and proceeds to issue a PO</a:t>
+              <a:t>Procurement proceeds to issue a PO — they may already have the vendor confirmed</a:t>
             </a:r>
           </a:p>
         </p:txBody>
